--- a/중간발표/00.D팀_중간발표.pptx
+++ b/중간발표/00.D팀_중간발표.pptx
@@ -1,23 +1,23 @@
 
 <file path=ppt/presentation.xml><?xml version="1.0" encoding="utf-8"?>
-<p:presentation xmlns:a="http://schemas.openxmlformats.org/drawingml/2006/main" xmlns:r="http://schemas.openxmlformats.org/officeDocument/2006/relationships" xmlns:p="http://schemas.openxmlformats.org/presentationml/2006/main" saveSubsetFonts="1">
+<p:presentation xmlns:a="http://schemas.openxmlformats.org/drawingml/2006/main" xmlns:r="http://schemas.openxmlformats.org/officeDocument/2006/relationships" xmlns:p="http://schemas.openxmlformats.org/presentationml/2006/main" xmlns:p14="http://schemas.microsoft.com/office/powerpoint/2010/main" saveSubsetFonts="1">
   <p:sldMasterIdLst>
-    <p:sldMasterId id="2147483648" r:id="rId1"/>
+    <p:sldMasterId id="2147483662" r:id="rId14"/>
   </p:sldMasterIdLst>
   <p:sldIdLst>
-    <p:sldId id="289" r:id="rId2"/>
-    <p:sldId id="291" r:id="rId3"/>
-    <p:sldId id="294" r:id="rId4"/>
-    <p:sldId id="333" r:id="rId5"/>
-    <p:sldId id="295" r:id="rId6"/>
-    <p:sldId id="336" r:id="rId7"/>
-    <p:sldId id="340" r:id="rId8"/>
-    <p:sldId id="337" r:id="rId9"/>
-    <p:sldId id="338" r:id="rId10"/>
-    <p:sldId id="339" r:id="rId11"/>
-    <p:sldId id="334" r:id="rId12"/>
-    <p:sldId id="335" r:id="rId13"/>
-    <p:sldId id="303" r:id="rId14"/>
+    <p:sldId id="289" r:id="rId16"/>
+    <p:sldId id="291" r:id="rId17"/>
+    <p:sldId id="294" r:id="rId18"/>
+    <p:sldId id="333" r:id="rId19"/>
+    <p:sldId id="295" r:id="rId20"/>
+    <p:sldId id="336" r:id="rId21"/>
+    <p:sldId id="340" r:id="rId22"/>
+    <p:sldId id="337" r:id="rId23"/>
+    <p:sldId id="338" r:id="rId24"/>
+    <p:sldId id="339" r:id="rId25"/>
+    <p:sldId id="334" r:id="rId26"/>
+    <p:sldId id="335" r:id="rId27"/>
+    <p:sldId id="303" r:id="rId28"/>
   </p:sldIdLst>
   <p:sldSz cx="12192000" cy="6858000"/>
   <p:notesSz cx="6858000" cy="9144000"/>
@@ -119,27 +119,27 @@
   <p:extLst>
     <p:ext uri="{EFAFB233-063F-42B5-8137-9DF3F51BA10A}">
       <p15:sldGuideLst xmlns:p15="http://schemas.microsoft.com/office/powerpoint/2012/main">
-        <p15:guide id="1" orient="horz" pos="1570" userDrawn="1">
+        <p15:guide id="1" orient="horz" pos="1569" userDrawn="1">
           <p15:clr>
             <a:srgbClr val="A4A3A4"/>
           </p15:clr>
         </p15:guide>
-        <p15:guide id="2" pos="325" userDrawn="1">
+        <p15:guide id="2" pos="324" userDrawn="1">
           <p15:clr>
             <a:srgbClr val="A4A3A4"/>
           </p15:clr>
         </p15:guide>
-        <p15:guide id="3" pos="7401" userDrawn="1">
+        <p15:guide id="3" pos="7400" userDrawn="1">
           <p15:clr>
             <a:srgbClr val="A4A3A4"/>
           </p15:clr>
         </p15:guide>
-        <p15:guide id="4" pos="3840" userDrawn="1">
+        <p15:guide id="4" pos="3839" userDrawn="1">
           <p15:clr>
             <a:srgbClr val="A4A3A4"/>
           </p15:clr>
         </p15:guide>
-        <p15:guide id="5" orient="horz" pos="4020" userDrawn="1">
+        <p15:guide id="5" orient="horz" pos="4019" userDrawn="1">
           <p15:clr>
             <a:srgbClr val="A4A3A4"/>
           </p15:clr>
@@ -18202,7 +18202,7 @@
 </file>
 
 <file path=ppt/slides/slide3.xml><?xml version="1.0" encoding="utf-8"?>
-<p:sld xmlns:a="http://schemas.openxmlformats.org/drawingml/2006/main" xmlns:r="http://schemas.openxmlformats.org/officeDocument/2006/relationships" xmlns:p="http://schemas.openxmlformats.org/presentationml/2006/main">
+<p:sld xmlns:a="http://schemas.openxmlformats.org/drawingml/2006/main" xmlns:r="http://schemas.openxmlformats.org/officeDocument/2006/relationships" xmlns:p="http://schemas.openxmlformats.org/presentationml/2006/main" xmlns:p14="http://schemas.microsoft.com/office/powerpoint/2010/main">
   <p:cSld>
     <p:spTree>
       <p:nvGrpSpPr>
@@ -18232,8 +18232,8 @@
         </p:nvSpPr>
         <p:spPr>
           <a:xfrm flipH="1" flipV="1">
-            <a:off x="174170" y="70719"/>
-            <a:ext cx="12017829" cy="1221051"/>
+            <a:off x="173990" y="70485"/>
+            <a:ext cx="12018010" cy="1221105"/>
           </a:xfrm>
           <a:prstGeom prst="round1Rect">
             <a:avLst>
@@ -18291,10 +18291,10 @@
         </p:nvGrpSpPr>
         <p:grpSpPr>
           <a:xfrm>
-            <a:off x="376102" y="333243"/>
-            <a:ext cx="5948498" cy="830997"/>
-            <a:chOff x="376102" y="333243"/>
-            <a:chExt cx="5948498" cy="830997"/>
+            <a:off x="375920" y="333375"/>
+            <a:ext cx="5948680" cy="831215"/>
+            <a:chOff x="375920" y="333375"/>
+            <a:chExt cx="5948680" cy="831215"/>
           </a:xfrm>
         </p:grpSpPr>
         <p:sp>
@@ -18311,8 +18311,8 @@
           </p:nvSpPr>
           <p:spPr>
             <a:xfrm>
-              <a:off x="1461721" y="366114"/>
-              <a:ext cx="2252213" cy="276999"/>
+              <a:off x="1461770" y="366395"/>
+              <a:ext cx="2252345" cy="276860"/>
             </a:xfrm>
             <a:prstGeom prst="rect">
               <a:avLst/>
@@ -18379,8 +18379,8 @@
           </p:nvSpPr>
           <p:spPr>
             <a:xfrm>
-              <a:off x="1461721" y="585057"/>
-              <a:ext cx="4862879" cy="523220"/>
+              <a:off x="1461770" y="584835"/>
+              <a:ext cx="4862830" cy="523240"/>
             </a:xfrm>
             <a:prstGeom prst="rect">
               <a:avLst/>
@@ -18434,8 +18434,8 @@
           </p:nvSpPr>
           <p:spPr>
             <a:xfrm>
-              <a:off x="376102" y="333243"/>
-              <a:ext cx="1266679" cy="830997"/>
+              <a:off x="375920" y="333375"/>
+              <a:ext cx="1266825" cy="831215"/>
             </a:xfrm>
             <a:prstGeom prst="rect">
               <a:avLst/>
@@ -18529,8 +18529,8 @@
         </p:blipFill>
         <p:spPr>
           <a:xfrm rot="10800000" flipV="1">
-            <a:off x="0" y="1916849"/>
-            <a:ext cx="12192000" cy="233580"/>
+            <a:off x="0" y="1917065"/>
+            <a:ext cx="12192000" cy="233680"/>
           </a:xfrm>
           <a:prstGeom prst="rect">
             <a:avLst/>
@@ -18664,8 +18664,8 @@
         </p:blipFill>
         <p:spPr>
           <a:xfrm rot="14660350">
-            <a:off x="1714" y="5530566"/>
-            <a:ext cx="1452422" cy="917364"/>
+            <a:off x="1905" y="5530850"/>
+            <a:ext cx="1452245" cy="917575"/>
           </a:xfrm>
           <a:prstGeom prst="rect">
             <a:avLst/>
@@ -18700,8 +18700,8 @@
         </p:blipFill>
         <p:spPr>
           <a:xfrm rot="21165700">
-            <a:off x="8621099" y="4762217"/>
-            <a:ext cx="3710393" cy="1869483"/>
+            <a:off x="8621395" y="4762500"/>
+            <a:ext cx="3710305" cy="1869440"/>
           </a:xfrm>
           <a:prstGeom prst="rect">
             <a:avLst/>
@@ -18736,8 +18736,8 @@
         </p:blipFill>
         <p:spPr>
           <a:xfrm>
-            <a:off x="11690202" y="3164584"/>
-            <a:ext cx="178594" cy="178594"/>
+            <a:off x="11690350" y="3164840"/>
+            <a:ext cx="178435" cy="178435"/>
           </a:xfrm>
           <a:prstGeom prst="rect">
             <a:avLst/>
@@ -18772,8 +18772,8 @@
         </p:blipFill>
         <p:spPr>
           <a:xfrm rot="20272352">
-            <a:off x="386995" y="5443343"/>
-            <a:ext cx="186904" cy="207671"/>
+            <a:off x="386715" y="5443220"/>
+            <a:ext cx="186690" cy="207645"/>
           </a:xfrm>
           <a:prstGeom prst="rect">
             <a:avLst/>
@@ -18807,8 +18807,8 @@
         </p:blipFill>
         <p:spPr>
           <a:xfrm rot="10800000">
-            <a:off x="11016343" y="4903197"/>
-            <a:ext cx="1175656" cy="779989"/>
+            <a:off x="11016615" y="4903470"/>
+            <a:ext cx="1175385" cy="779780"/>
           </a:xfrm>
           <a:prstGeom prst="rect">
             <a:avLst/>
@@ -18842,8 +18842,8 @@
         </p:blipFill>
         <p:spPr>
           <a:xfrm>
-            <a:off x="0" y="3261891"/>
-            <a:ext cx="2914927" cy="2847758"/>
+            <a:off x="0" y="3261995"/>
+            <a:ext cx="2914650" cy="2847975"/>
           </a:xfrm>
           <a:prstGeom prst="rect">
             <a:avLst/>
@@ -18878,8 +18878,8 @@
         </p:blipFill>
         <p:spPr>
           <a:xfrm>
-            <a:off x="0" y="5934670"/>
-            <a:ext cx="12192000" cy="923330"/>
+            <a:off x="0" y="5934710"/>
+            <a:ext cx="12192000" cy="923290"/>
           </a:xfrm>
           <a:prstGeom prst="rect">
             <a:avLst/>
@@ -18914,8 +18914,8 @@
         </p:blipFill>
         <p:spPr>
           <a:xfrm>
-            <a:off x="11672484" y="2240918"/>
-            <a:ext cx="149373" cy="149373"/>
+            <a:off x="11672570" y="2240915"/>
+            <a:ext cx="149225" cy="149225"/>
           </a:xfrm>
           <a:prstGeom prst="rect">
             <a:avLst/>
@@ -18936,10 +18936,10 @@
         </p:nvGrpSpPr>
         <p:grpSpPr>
           <a:xfrm>
-            <a:off x="7339013" y="2373418"/>
-            <a:ext cx="2122307" cy="3803725"/>
-            <a:chOff x="7348911" y="2373418"/>
-            <a:chExt cx="2122307" cy="3803725"/>
+            <a:off x="7339330" y="2373630"/>
+            <a:ext cx="2122170" cy="3803650"/>
+            <a:chOff x="7339330" y="2373630"/>
+            <a:chExt cx="2122170" cy="3803650"/>
           </a:xfrm>
         </p:grpSpPr>
         <p:grpSp>
@@ -18956,10 +18956,10 @@
           </p:nvGrpSpPr>
           <p:grpSpPr>
             <a:xfrm>
-              <a:off x="7348911" y="2567441"/>
-              <a:ext cx="2122307" cy="3609702"/>
-              <a:chOff x="2815881" y="2567441"/>
-              <a:chExt cx="2122307" cy="3609702"/>
+              <a:off x="7339330" y="2567305"/>
+              <a:ext cx="2122170" cy="3609975"/>
+              <a:chOff x="7339330" y="2567305"/>
+              <a:chExt cx="2122170" cy="3609975"/>
             </a:xfrm>
             <a:effectLst/>
           </p:grpSpPr>
@@ -18977,8 +18977,8 @@
             </p:nvSpPr>
             <p:spPr>
               <a:xfrm>
-                <a:off x="2815881" y="2567441"/>
-                <a:ext cx="2122307" cy="3609702"/>
+                <a:off x="7339330" y="2567305"/>
+                <a:ext cx="2122170" cy="3609975"/>
               </a:xfrm>
               <a:prstGeom prst="round2SameRect">
                 <a:avLst/>
@@ -19036,8 +19036,8 @@
             </p:nvSpPr>
             <p:spPr>
               <a:xfrm>
-                <a:off x="2815882" y="6034088"/>
-                <a:ext cx="2122306" cy="143055"/>
+                <a:off x="7339330" y="6034405"/>
+                <a:ext cx="2122170" cy="142875"/>
               </a:xfrm>
               <a:prstGeom prst="rect">
                 <a:avLst/>
@@ -19089,10 +19089,10 @@
           </p:nvGrpSpPr>
           <p:grpSpPr>
             <a:xfrm>
-              <a:off x="8203202" y="2373418"/>
-              <a:ext cx="408282" cy="351966"/>
-              <a:chOff x="450324" y="2128945"/>
-              <a:chExt cx="889526" cy="766832"/>
+              <a:off x="8193405" y="2373630"/>
+              <a:ext cx="408305" cy="351790"/>
+              <a:chOff x="8193405" y="2373630"/>
+              <a:chExt cx="408305" cy="351790"/>
             </a:xfrm>
           </p:grpSpPr>
           <p:sp>
@@ -19109,8 +19109,8 @@
             </p:nvSpPr>
             <p:spPr>
               <a:xfrm>
-                <a:off x="450324" y="2128945"/>
-                <a:ext cx="889526" cy="766832"/>
+                <a:off x="8193405" y="2373630"/>
+                <a:ext cx="408305" cy="351790"/>
               </a:xfrm>
               <a:prstGeom prst="hexagon">
                 <a:avLst/>
@@ -19163,8 +19163,8 @@
             </p:nvSpPr>
             <p:spPr>
               <a:xfrm rot="4666750">
-                <a:off x="505813" y="2117833"/>
-                <a:ext cx="667576" cy="698546"/>
+                <a:off x="8218805" y="2368550"/>
+                <a:ext cx="306705" cy="320675"/>
               </a:xfrm>
               <a:custGeom>
                 <a:avLst/>
@@ -19296,8 +19296,8 @@
             </p:nvSpPr>
             <p:spPr>
               <a:xfrm>
-                <a:off x="616568" y="2271884"/>
-                <a:ext cx="557043" cy="536444"/>
+                <a:off x="8269605" y="2439035"/>
+                <a:ext cx="255905" cy="246380"/>
               </a:xfrm>
               <a:prstGeom prst="rect">
                 <a:avLst/>
@@ -19362,8 +19362,8 @@
           </p:nvSpPr>
           <p:spPr>
             <a:xfrm>
-              <a:off x="7557944" y="3060042"/>
-              <a:ext cx="1704241" cy="735586"/>
+              <a:off x="7548245" y="3060065"/>
+              <a:ext cx="1704340" cy="735330"/>
             </a:xfrm>
             <a:prstGeom prst="rect">
               <a:avLst/>
@@ -19468,10 +19468,10 @@
         </p:nvGrpSpPr>
         <p:grpSpPr>
           <a:xfrm>
-            <a:off x="491899" y="2373418"/>
-            <a:ext cx="2122308" cy="3803725"/>
-            <a:chOff x="501797" y="2373418"/>
-            <a:chExt cx="2122308" cy="3803725"/>
+            <a:off x="492125" y="2373630"/>
+            <a:ext cx="2122170" cy="3803650"/>
+            <a:chOff x="492125" y="2373630"/>
+            <a:chExt cx="2122170" cy="3803650"/>
           </a:xfrm>
         </p:grpSpPr>
         <p:grpSp>
@@ -19488,10 +19488,10 @@
           </p:nvGrpSpPr>
           <p:grpSpPr>
             <a:xfrm>
-              <a:off x="501798" y="2567441"/>
-              <a:ext cx="2122307" cy="3609702"/>
-              <a:chOff x="541891" y="2567441"/>
-              <a:chExt cx="2122307" cy="3609702"/>
+              <a:off x="492125" y="2567305"/>
+              <a:ext cx="2122170" cy="3609975"/>
+              <a:chOff x="492125" y="2567305"/>
+              <a:chExt cx="2122170" cy="3609975"/>
             </a:xfrm>
             <a:effectLst/>
           </p:grpSpPr>
@@ -19509,8 +19509,8 @@
             </p:nvSpPr>
             <p:spPr>
               <a:xfrm>
-                <a:off x="541891" y="2567441"/>
-                <a:ext cx="2122307" cy="3609702"/>
+                <a:off x="492125" y="2567305"/>
+                <a:ext cx="2122170" cy="3609975"/>
               </a:xfrm>
               <a:prstGeom prst="round2SameRect">
                 <a:avLst/>
@@ -19568,8 +19568,8 @@
             </p:nvSpPr>
             <p:spPr>
               <a:xfrm>
-                <a:off x="541891" y="6034088"/>
-                <a:ext cx="2122306" cy="143055"/>
+                <a:off x="492125" y="6034405"/>
+                <a:ext cx="2122170" cy="142875"/>
               </a:xfrm>
               <a:prstGeom prst="rect">
                 <a:avLst/>
@@ -19621,8 +19621,8 @@
           </p:nvSpPr>
           <p:spPr>
             <a:xfrm>
-              <a:off x="692662" y="3060042"/>
-              <a:ext cx="1740575" cy="1057212"/>
+              <a:off x="682625" y="3060065"/>
+              <a:ext cx="1740535" cy="1057275"/>
             </a:xfrm>
             <a:prstGeom prst="rect">
               <a:avLst/>
@@ -19729,10 +19729,10 @@
           </p:nvGrpSpPr>
           <p:grpSpPr>
             <a:xfrm>
-              <a:off x="1398903" y="2373418"/>
-              <a:ext cx="408282" cy="388045"/>
-              <a:chOff x="450324" y="2128945"/>
-              <a:chExt cx="889526" cy="845438"/>
+              <a:off x="1388745" y="2373630"/>
+              <a:ext cx="408305" cy="387985"/>
+              <a:chOff x="1388745" y="2373630"/>
+              <a:chExt cx="408305" cy="387985"/>
             </a:xfrm>
           </p:grpSpPr>
           <p:sp>
@@ -19749,8 +19749,8 @@
             </p:nvSpPr>
             <p:spPr>
               <a:xfrm>
-                <a:off x="450324" y="2128945"/>
-                <a:ext cx="889526" cy="766832"/>
+                <a:off x="1388745" y="2373630"/>
+                <a:ext cx="408305" cy="351790"/>
               </a:xfrm>
               <a:prstGeom prst="hexagon">
                 <a:avLst/>
@@ -19803,8 +19803,8 @@
             </p:nvSpPr>
             <p:spPr>
               <a:xfrm rot="4666750">
-                <a:off x="505813" y="2117833"/>
-                <a:ext cx="667576" cy="698546"/>
+                <a:off x="1414780" y="2368550"/>
+                <a:ext cx="306705" cy="320675"/>
               </a:xfrm>
               <a:custGeom>
                 <a:avLst/>
@@ -19936,8 +19936,8 @@
             </p:nvSpPr>
             <p:spPr>
               <a:xfrm>
-                <a:off x="616568" y="2271884"/>
-                <a:ext cx="557043" cy="702499"/>
+                <a:off x="1465580" y="2439035"/>
+                <a:ext cx="255905" cy="322580"/>
               </a:xfrm>
               <a:prstGeom prst="rect">
                 <a:avLst/>
@@ -20002,8 +20002,8 @@
           </p:nvSpPr>
           <p:spPr>
             <a:xfrm>
-              <a:off x="501797" y="4453027"/>
-              <a:ext cx="2122307" cy="278218"/>
+              <a:off x="492125" y="4453255"/>
+              <a:ext cx="2122170" cy="278130"/>
             </a:xfrm>
             <a:prstGeom prst="rect">
               <a:avLst/>
@@ -20059,8 +20059,8 @@
           </p:nvCxnSpPr>
           <p:spPr>
             <a:xfrm>
-              <a:off x="1458728" y="4260129"/>
-              <a:ext cx="208445" cy="0"/>
+              <a:off x="1449070" y="4260215"/>
+              <a:ext cx="208280" cy="0"/>
             </a:xfrm>
             <a:prstGeom prst="line">
               <a:avLst/>
@@ -20101,10 +20101,10 @@
         </p:nvGrpSpPr>
         <p:grpSpPr>
           <a:xfrm>
-            <a:off x="2774271" y="2373418"/>
-            <a:ext cx="2133597" cy="3803725"/>
-            <a:chOff x="2784169" y="2373418"/>
-            <a:chExt cx="2133597" cy="3803725"/>
+            <a:off x="2774315" y="2373630"/>
+            <a:ext cx="2133600" cy="3803650"/>
+            <a:chOff x="2774315" y="2373630"/>
+            <a:chExt cx="2133600" cy="3803650"/>
           </a:xfrm>
         </p:grpSpPr>
         <p:grpSp>
@@ -20121,10 +20121,10 @@
           </p:nvGrpSpPr>
           <p:grpSpPr>
             <a:xfrm>
-              <a:off x="2784169" y="2567441"/>
-              <a:ext cx="2122307" cy="3609702"/>
-              <a:chOff x="2815881" y="2567441"/>
-              <a:chExt cx="2122307" cy="3609702"/>
+              <a:off x="2774315" y="2567305"/>
+              <a:ext cx="2122170" cy="3609975"/>
+              <a:chOff x="2774315" y="2567305"/>
+              <a:chExt cx="2122170" cy="3609975"/>
             </a:xfrm>
             <a:effectLst/>
           </p:grpSpPr>
@@ -20142,8 +20142,8 @@
             </p:nvSpPr>
             <p:spPr>
               <a:xfrm>
-                <a:off x="2815881" y="2567441"/>
-                <a:ext cx="2122307" cy="3609702"/>
+                <a:off x="2774315" y="2567305"/>
+                <a:ext cx="2122170" cy="3609975"/>
               </a:xfrm>
               <a:prstGeom prst="round2SameRect">
                 <a:avLst/>
@@ -20201,8 +20201,8 @@
             </p:nvSpPr>
             <p:spPr>
               <a:xfrm>
-                <a:off x="2815882" y="6034088"/>
-                <a:ext cx="2122306" cy="143055"/>
+                <a:off x="2774315" y="6034405"/>
+                <a:ext cx="2122170" cy="142875"/>
               </a:xfrm>
               <a:prstGeom prst="rect">
                 <a:avLst/>
@@ -20254,10 +20254,10 @@
           </p:nvGrpSpPr>
           <p:grpSpPr>
             <a:xfrm>
-              <a:off x="3688352" y="2373418"/>
-              <a:ext cx="408282" cy="351966"/>
-              <a:chOff x="450324" y="2128945"/>
-              <a:chExt cx="889526" cy="766832"/>
+              <a:off x="3678555" y="2373630"/>
+              <a:ext cx="408305" cy="351790"/>
+              <a:chOff x="3678555" y="2373630"/>
+              <a:chExt cx="408305" cy="351790"/>
             </a:xfrm>
           </p:grpSpPr>
           <p:sp>
@@ -20274,8 +20274,8 @@
             </p:nvSpPr>
             <p:spPr>
               <a:xfrm>
-                <a:off x="450324" y="2128945"/>
-                <a:ext cx="889526" cy="766832"/>
+                <a:off x="3678555" y="2373630"/>
+                <a:ext cx="408305" cy="351790"/>
               </a:xfrm>
               <a:prstGeom prst="hexagon">
                 <a:avLst/>
@@ -20328,8 +20328,8 @@
             </p:nvSpPr>
             <p:spPr>
               <a:xfrm rot="4666750">
-                <a:off x="505813" y="2117833"/>
-                <a:ext cx="667576" cy="698546"/>
+                <a:off x="3703955" y="2368550"/>
+                <a:ext cx="306705" cy="320675"/>
               </a:xfrm>
               <a:custGeom>
                 <a:avLst/>
@@ -20461,8 +20461,8 @@
             </p:nvSpPr>
             <p:spPr>
               <a:xfrm>
-                <a:off x="616568" y="2271884"/>
-                <a:ext cx="557043" cy="536444"/>
+                <a:off x="3754755" y="2439035"/>
+                <a:ext cx="255905" cy="246380"/>
               </a:xfrm>
               <a:prstGeom prst="rect">
                 <a:avLst/>
@@ -20527,8 +20527,8 @@
           </p:nvSpPr>
           <p:spPr>
             <a:xfrm>
-              <a:off x="2993202" y="3060042"/>
-              <a:ext cx="1704241" cy="735586"/>
+              <a:off x="2983230" y="3060065"/>
+              <a:ext cx="1704340" cy="735330"/>
             </a:xfrm>
             <a:prstGeom prst="rect">
               <a:avLst/>
@@ -20635,8 +20635,8 @@
           </p:nvSpPr>
           <p:spPr>
             <a:xfrm>
-              <a:off x="2795459" y="4453027"/>
-              <a:ext cx="2122307" cy="278218"/>
+              <a:off x="2785745" y="4453255"/>
+              <a:ext cx="2122170" cy="278130"/>
             </a:xfrm>
             <a:prstGeom prst="rect">
               <a:avLst/>
@@ -20713,8 +20713,8 @@
           </p:nvCxnSpPr>
           <p:spPr>
             <a:xfrm>
-              <a:off x="3741100" y="4260129"/>
-              <a:ext cx="208445" cy="0"/>
+              <a:off x="3731260" y="4260215"/>
+              <a:ext cx="208280" cy="0"/>
             </a:xfrm>
             <a:prstGeom prst="line">
               <a:avLst/>
@@ -20755,10 +20755,10 @@
         </p:nvGrpSpPr>
         <p:grpSpPr>
           <a:xfrm>
-            <a:off x="4941296" y="2373418"/>
-            <a:ext cx="2361961" cy="3803725"/>
-            <a:chOff x="4951194" y="2373418"/>
-            <a:chExt cx="2361961" cy="3803725"/>
+            <a:off x="4941570" y="2373630"/>
+            <a:ext cx="2362200" cy="3803650"/>
+            <a:chOff x="4941570" y="2373630"/>
+            <a:chExt cx="2362200" cy="3803650"/>
           </a:xfrm>
         </p:grpSpPr>
         <p:grpSp>
@@ -20775,10 +20775,10 @@
           </p:nvGrpSpPr>
           <p:grpSpPr>
             <a:xfrm>
-              <a:off x="5066540" y="2567441"/>
-              <a:ext cx="2122307" cy="3609702"/>
-              <a:chOff x="541891" y="2567441"/>
-              <a:chExt cx="2122307" cy="3609702"/>
+              <a:off x="5056505" y="2567305"/>
+              <a:ext cx="2122170" cy="3609975"/>
+              <a:chOff x="5056505" y="2567305"/>
+              <a:chExt cx="2122170" cy="3609975"/>
             </a:xfrm>
             <a:effectLst/>
           </p:grpSpPr>
@@ -20796,8 +20796,8 @@
             </p:nvSpPr>
             <p:spPr>
               <a:xfrm>
-                <a:off x="541891" y="2567441"/>
-                <a:ext cx="2122307" cy="3609702"/>
+                <a:off x="5056505" y="2567305"/>
+                <a:ext cx="2122170" cy="3609975"/>
               </a:xfrm>
               <a:prstGeom prst="round2SameRect">
                 <a:avLst/>
@@ -20855,8 +20855,8 @@
             </p:nvSpPr>
             <p:spPr>
               <a:xfrm>
-                <a:off x="541891" y="6034088"/>
-                <a:ext cx="2122306" cy="143055"/>
+                <a:off x="5056505" y="6034405"/>
+                <a:ext cx="2122170" cy="142875"/>
               </a:xfrm>
               <a:prstGeom prst="rect">
                 <a:avLst/>
@@ -20908,10 +20908,10 @@
           </p:nvGrpSpPr>
           <p:grpSpPr>
             <a:xfrm>
-              <a:off x="5923552" y="2373418"/>
-              <a:ext cx="408282" cy="351966"/>
-              <a:chOff x="450324" y="2128945"/>
-              <a:chExt cx="889526" cy="766832"/>
+              <a:off x="5913755" y="2373630"/>
+              <a:ext cx="408305" cy="351790"/>
+              <a:chOff x="5913755" y="2373630"/>
+              <a:chExt cx="408305" cy="351790"/>
             </a:xfrm>
           </p:grpSpPr>
           <p:sp>
@@ -20928,8 +20928,8 @@
             </p:nvSpPr>
             <p:spPr>
               <a:xfrm>
-                <a:off x="450324" y="2128945"/>
-                <a:ext cx="889526" cy="766832"/>
+                <a:off x="5913755" y="2373630"/>
+                <a:ext cx="408305" cy="351790"/>
               </a:xfrm>
               <a:prstGeom prst="hexagon">
                 <a:avLst/>
@@ -20982,8 +20982,8 @@
             </p:nvSpPr>
             <p:spPr>
               <a:xfrm rot="4666750">
-                <a:off x="505813" y="2117833"/>
-                <a:ext cx="667576" cy="698546"/>
+                <a:off x="5939155" y="2368550"/>
+                <a:ext cx="306705" cy="320675"/>
               </a:xfrm>
               <a:custGeom>
                 <a:avLst/>
@@ -21115,8 +21115,8 @@
             </p:nvSpPr>
             <p:spPr>
               <a:xfrm>
-                <a:off x="616568" y="2271884"/>
-                <a:ext cx="557043" cy="536444"/>
+                <a:off x="5989955" y="2439035"/>
+                <a:ext cx="255905" cy="246380"/>
               </a:xfrm>
               <a:prstGeom prst="rect">
                 <a:avLst/>
@@ -21181,8 +21181,8 @@
           </p:nvSpPr>
           <p:spPr>
             <a:xfrm>
-              <a:off x="5275573" y="3060042"/>
-              <a:ext cx="1704241" cy="735586"/>
+              <a:off x="5265420" y="3060065"/>
+              <a:ext cx="1704340" cy="735330"/>
             </a:xfrm>
             <a:prstGeom prst="rect">
               <a:avLst/>
@@ -21286,8 +21286,8 @@
           </p:nvSpPr>
           <p:spPr>
             <a:xfrm>
-              <a:off x="4951194" y="4453027"/>
-              <a:ext cx="2361961" cy="1497013"/>
+              <a:off x="4941570" y="4453255"/>
+              <a:ext cx="2362200" cy="1497330"/>
             </a:xfrm>
             <a:prstGeom prst="rect">
               <a:avLst/>
@@ -21613,8 +21613,8 @@
           </p:nvCxnSpPr>
           <p:spPr>
             <a:xfrm>
-              <a:off x="6021203" y="4260129"/>
-              <a:ext cx="208445" cy="0"/>
+              <a:off x="6011545" y="4260215"/>
+              <a:ext cx="208280" cy="0"/>
             </a:xfrm>
             <a:prstGeom prst="line">
               <a:avLst/>
@@ -21655,10 +21655,10 @@
         </p:nvGrpSpPr>
         <p:grpSpPr>
           <a:xfrm>
-            <a:off x="9616850" y="2373418"/>
-            <a:ext cx="2126842" cy="3803725"/>
-            <a:chOff x="9626748" y="2373418"/>
-            <a:chExt cx="2126842" cy="3803725"/>
+            <a:off x="9617075" y="2373630"/>
+            <a:ext cx="2126615" cy="3803650"/>
+            <a:chOff x="9617075" y="2373630"/>
+            <a:chExt cx="2126615" cy="3803650"/>
           </a:xfrm>
         </p:grpSpPr>
         <p:grpSp>
@@ -21675,43 +21675,38 @@
           </p:nvGrpSpPr>
           <p:grpSpPr>
             <a:xfrm>
-              <a:off x="9631283" y="2567441"/>
-              <a:ext cx="2122307" cy="3609702"/>
-              <a:chOff x="541891" y="2567441"/>
-              <a:chExt cx="2122307" cy="3609702"/>
+              <a:off x="9621520" y="2567305"/>
+              <a:ext cx="2122170" cy="3609975"/>
+              <a:chOff x="9621520" y="2567305"/>
+              <a:chExt cx="2122170" cy="3609975"/>
             </a:xfrm>
             <a:effectLst/>
           </p:grpSpPr>
           <p:sp>
             <p:nvSpPr>
-              <p:cNvPr id="122" name="사각형: 둥근 위쪽 모서리 121">
-                <a:extLst>
-                  <a:ext uri="{FF2B5EF4-FFF2-40B4-BE49-F238E27FC236}">
-                    <a16:creationId xmlns:a16="http://schemas.microsoft.com/office/drawing/2014/main" id="{9F1D2BA5-A67E-8CA8-68CC-CC5DD3253E8D}"/>
-                  </a:ext>
-                </a:extLst>
-              </p:cNvPr>
-              <p:cNvSpPr/>
+              <p:cNvPr id="122" name="사각형: 둥근 위쪽 모서리 121"/>
+              <p:cNvSpPr>
+                <a:spLocks/>
+              </p:cNvSpPr>
               <p:nvPr/>
             </p:nvSpPr>
             <p:spPr>
-              <a:xfrm>
-                <a:off x="541891" y="2567441"/>
-                <a:ext cx="2122307" cy="3609702"/>
+              <a:xfrm rot="0">
+                <a:off x="9621520" y="2567305"/>
+                <a:ext cx="2122805" cy="3610610"/>
               </a:xfrm>
-              <a:prstGeom prst="round2SameRect">
-                <a:avLst/>
-              </a:prstGeom>
+              <a:prstGeom prst="round2SameRect"/>
               <a:solidFill>
                 <a:srgbClr val="FCFDFE"/>
               </a:solidFill>
-              <a:ln>
+              <a:ln w="0">
                 <a:noFill/>
+                <a:prstDash/>
               </a:ln>
               <a:effectLst>
-                <a:outerShdw blurRad="63500" sx="102000" sy="102000" algn="ctr" rotWithShape="0">
+                <a:outerShdw sx="102000" sy="102000" blurRad="63500" dist="0" dir="0" rotWithShape="0" algn="ctr">
                   <a:srgbClr val="3378C8">
-                    <a:alpha val="10000"/>
+                    <a:alpha val="9803"/>
                   </a:srgbClr>
                 </a:outerShdw>
               </a:effectLst>
@@ -21733,39 +21728,39 @@
               </a:fontRef>
             </p:style>
             <p:txBody>
-              <a:bodyPr rtlCol="0" anchor="ctr"/>
+              <a:bodyPr wrap="square" lIns="91440" tIns="45720" rIns="91440" bIns="45720" numCol="1" vert="horz" anchor="ctr">
+                <a:noAutofit/>
+              </a:bodyPr>
               <a:lstStyle/>
               <a:p>
-                <a:pPr algn="ctr"/>
+                <a:pPr marL="0" indent="0" algn="ctr" latinLnBrk="0">
+                  <a:buFontTx/>
+                  <a:buNone/>
+                </a:pPr>
                 <a:endParaRPr lang="ko-KR" altLang="en-US"/>
               </a:p>
             </p:txBody>
           </p:sp>
           <p:sp>
             <p:nvSpPr>
-              <p:cNvPr id="123" name="직사각형 122">
-                <a:extLst>
-                  <a:ext uri="{FF2B5EF4-FFF2-40B4-BE49-F238E27FC236}">
-                    <a16:creationId xmlns:a16="http://schemas.microsoft.com/office/drawing/2014/main" id="{E43722B3-BD0E-2ECA-6689-6A2C0563E3C8}"/>
-                  </a:ext>
-                </a:extLst>
-              </p:cNvPr>
-              <p:cNvSpPr/>
+              <p:cNvPr id="123" name="직사각형 122"/>
+              <p:cNvSpPr>
+                <a:spLocks/>
+              </p:cNvSpPr>
               <p:nvPr/>
             </p:nvSpPr>
             <p:spPr>
-              <a:xfrm>
-                <a:off x="541891" y="6034088"/>
-                <a:ext cx="2122306" cy="143055"/>
+              <a:xfrm rot="0">
+                <a:off x="9621520" y="6034405"/>
+                <a:ext cx="2122805" cy="143510"/>
               </a:xfrm>
-              <a:prstGeom prst="rect">
-                <a:avLst/>
-              </a:prstGeom>
+              <a:prstGeom prst="rect"/>
               <a:solidFill>
                 <a:srgbClr val="3378C8"/>
               </a:solidFill>
-              <a:ln>
+              <a:ln w="0">
                 <a:noFill/>
+                <a:prstDash/>
               </a:ln>
             </p:spPr>
             <p:style>
@@ -21785,10 +21780,15 @@
               </a:fontRef>
             </p:style>
             <p:txBody>
-              <a:bodyPr rtlCol="0" anchor="ctr"/>
+              <a:bodyPr wrap="square" lIns="91440" tIns="45720" rIns="91440" bIns="45720" numCol="1" vert="horz" anchor="ctr">
+                <a:noAutofit/>
+              </a:bodyPr>
               <a:lstStyle/>
               <a:p>
-                <a:pPr algn="ctr"/>
+                <a:pPr marL="0" indent="0" algn="ctr" latinLnBrk="0">
+                  <a:buFontTx/>
+                  <a:buNone/>
+                </a:pPr>
                 <a:endParaRPr lang="ko-KR" altLang="en-US"/>
               </a:p>
             </p:txBody>
@@ -21808,39 +21808,36 @@
           </p:nvGrpSpPr>
           <p:grpSpPr>
             <a:xfrm>
-              <a:off x="10488295" y="2373418"/>
-              <a:ext cx="408282" cy="351966"/>
-              <a:chOff x="450324" y="2128945"/>
-              <a:chExt cx="889526" cy="766832"/>
+              <a:off x="10478135" y="2373630"/>
+              <a:ext cx="408305" cy="351790"/>
+              <a:chOff x="10478135" y="2373630"/>
+              <a:chExt cx="408305" cy="351790"/>
             </a:xfrm>
           </p:grpSpPr>
           <p:sp>
             <p:nvSpPr>
-              <p:cNvPr id="119" name="육각형 118">
-                <a:extLst>
-                  <a:ext uri="{FF2B5EF4-FFF2-40B4-BE49-F238E27FC236}">
-                    <a16:creationId xmlns:a16="http://schemas.microsoft.com/office/drawing/2014/main" id="{0F2F5C11-84D6-40F6-58B4-4FE0F40AE182}"/>
-                  </a:ext>
-                </a:extLst>
-              </p:cNvPr>
-              <p:cNvSpPr/>
+              <p:cNvPr id="119" name="육각형 118"/>
+              <p:cNvSpPr>
+                <a:spLocks/>
+              </p:cNvSpPr>
               <p:nvPr/>
             </p:nvSpPr>
             <p:spPr>
-              <a:xfrm>
-                <a:off x="450324" y="2128945"/>
-                <a:ext cx="889526" cy="766832"/>
+              <a:xfrm rot="0">
+                <a:off x="10478135" y="2373630"/>
+                <a:ext cx="408940" cy="352425"/>
               </a:xfrm>
-              <a:prstGeom prst="hexagon">
-                <a:avLst/>
-              </a:prstGeom>
+              <a:prstGeom prst="hexagon"/>
               <a:solidFill>
                 <a:srgbClr val="3378C8"/>
               </a:solidFill>
-              <a:ln w="12700">
+              <a:ln w="12700" cap="flat" cmpd="sng">
                 <a:solidFill>
-                  <a:srgbClr val="3378C8"/>
+                  <a:srgbClr val="3378C8">
+                    <a:alpha val="100000"/>
+                  </a:srgbClr>
                 </a:solidFill>
+                <a:prstDash val="solid"/>
               </a:ln>
             </p:spPr>
             <p:style>
@@ -21860,76 +21857,75 @@
               </a:fontRef>
             </p:style>
             <p:txBody>
-              <a:bodyPr rtlCol="0" anchor="ctr"/>
+              <a:bodyPr wrap="square" lIns="91440" tIns="45720" rIns="91440" bIns="45720" numCol="1" vert="horz" anchor="ctr">
+                <a:noAutofit/>
+              </a:bodyPr>
               <a:lstStyle/>
               <a:p>
-                <a:pPr algn="ctr"/>
+                <a:pPr marL="0" indent="0" algn="ctr" latinLnBrk="0">
+                  <a:buFontTx/>
+                  <a:buNone/>
+                </a:pPr>
                 <a:endParaRPr lang="ko-KR" altLang="en-US" sz="1400"/>
               </a:p>
             </p:txBody>
           </p:sp>
           <p:sp>
             <p:nvSpPr>
-              <p:cNvPr id="120" name="자유형: 도형 119">
-                <a:extLst>
-                  <a:ext uri="{FF2B5EF4-FFF2-40B4-BE49-F238E27FC236}">
-                    <a16:creationId xmlns:a16="http://schemas.microsoft.com/office/drawing/2014/main" id="{2446D4A2-DACF-C677-5F03-56CE8A2EFC79}"/>
-                  </a:ext>
-                </a:extLst>
-              </p:cNvPr>
-              <p:cNvSpPr/>
+              <p:cNvPr id="120" name="자유형: 도형 119"/>
+              <p:cNvSpPr>
+                <a:spLocks/>
+              </p:cNvSpPr>
               <p:nvPr/>
             </p:nvSpPr>
             <p:spPr>
-              <a:xfrm rot="4666750">
-                <a:off x="505813" y="2117833"/>
-                <a:ext cx="667576" cy="698546"/>
+              <a:xfrm rot="4620000">
+                <a:off x="10504170" y="2368550"/>
+                <a:ext cx="307340" cy="321310"/>
               </a:xfrm>
               <a:custGeom>
-                <a:avLst/>
                 <a:gdLst>
-                  <a:gd name="connsiteX0" fmla="*/ 0 w 751712"/>
-                  <a:gd name="connsiteY0" fmla="*/ 497894 h 766419"/>
-                  <a:gd name="connsiteX1" fmla="*/ 107134 w 751712"/>
-                  <a:gd name="connsiteY1" fmla="*/ 3253 h 766419"/>
-                  <a:gd name="connsiteX2" fmla="*/ 119855 w 751712"/>
-                  <a:gd name="connsiteY2" fmla="*/ 0 h 766419"/>
-                  <a:gd name="connsiteX3" fmla="*/ 751712 w 751712"/>
-                  <a:gd name="connsiteY3" fmla="*/ 649798 h 766419"/>
-                  <a:gd name="connsiteX4" fmla="*/ 749455 w 751712"/>
-                  <a:gd name="connsiteY4" fmla="*/ 660217 h 766419"/>
-                  <a:gd name="connsiteX5" fmla="*/ 334147 w 751712"/>
-                  <a:gd name="connsiteY5" fmla="*/ 766419 h 766419"/>
-                  <a:gd name="connsiteX6" fmla="*/ 0 w 751712"/>
-                  <a:gd name="connsiteY6" fmla="*/ 497894 h 766419"/>
+                  <a:gd fmla="*/ 0 w 751713" name="TX0"/>
+                  <a:gd fmla="*/ 497894 h 766420" name="TY0"/>
+                  <a:gd fmla="*/ 107134 w 751713" name="TX1"/>
+                  <a:gd fmla="*/ 3253 h 766420" name="TY1"/>
+                  <a:gd fmla="*/ 119855 w 751713" name="TX2"/>
+                  <a:gd fmla="*/ 0 h 766420" name="TY2"/>
+                  <a:gd fmla="*/ 751712 w 751713" name="TX3"/>
+                  <a:gd fmla="*/ 649798 h 766420" name="TY3"/>
+                  <a:gd fmla="*/ 749455 w 751713" name="TX4"/>
+                  <a:gd fmla="*/ 660217 h 766420" name="TY4"/>
+                  <a:gd fmla="*/ 334147 w 751713" name="TX5"/>
+                  <a:gd fmla="*/ 766419 h 766420" name="TY5"/>
+                  <a:gd fmla="*/ 0 w 751713" name="TX6"/>
+                  <a:gd fmla="*/ 497894 h 766420" name="TY6"/>
                 </a:gdLst>
-                <a:ahLst/>
                 <a:cxnLst>
                   <a:cxn ang="0">
-                    <a:pos x="connsiteX0" y="connsiteY0"/>
+                    <a:pos x="TX0" y="TY0"/>
                   </a:cxn>
                   <a:cxn ang="0">
-                    <a:pos x="connsiteX1" y="connsiteY1"/>
+                    <a:pos x="TX1" y="TY1"/>
                   </a:cxn>
                   <a:cxn ang="0">
-                    <a:pos x="connsiteX2" y="connsiteY2"/>
+                    <a:pos x="TX2" y="TY2"/>
                   </a:cxn>
                   <a:cxn ang="0">
-                    <a:pos x="connsiteX3" y="connsiteY3"/>
+                    <a:pos x="TX3" y="TY3"/>
                   </a:cxn>
                   <a:cxn ang="0">
-                    <a:pos x="connsiteX4" y="connsiteY4"/>
+                    <a:pos x="TX4" y="TY4"/>
                   </a:cxn>
                   <a:cxn ang="0">
-                    <a:pos x="connsiteX5" y="connsiteY5"/>
+                    <a:pos x="TX5" y="TY5"/>
                   </a:cxn>
                   <a:cxn ang="0">
-                    <a:pos x="connsiteX6" y="connsiteY6"/>
+                    <a:pos x="TX6" y="TY6"/>
                   </a:cxn>
                 </a:cxnLst>
                 <a:rect l="l" t="t" r="r" b="b"/>
                 <a:pathLst>
-                  <a:path w="751712" h="766419">
+                  <a:path w="751713" h="766420">
                     <a:moveTo>
                       <a:pt x="0" y="497894"/>
                     </a:moveTo>
@@ -21955,23 +21951,24 @@
                   </a:path>
                 </a:pathLst>
               </a:custGeom>
-              <a:gradFill>
+              <a:gradFill rotWithShape="1">
                 <a:gsLst>
+                  <a:gs pos="0">
+                    <a:srgbClr val="2069C2">
+                      <a:alpha val="14000"/>
+                    </a:srgbClr>
+                  </a:gs>
                   <a:gs pos="69000">
                     <a:schemeClr val="bg1">
                       <a:alpha val="20000"/>
                     </a:schemeClr>
                   </a:gs>
-                  <a:gs pos="0">
-                    <a:srgbClr val="2069C2">
-                      <a:alpha val="14000"/>
-                    </a:srgbClr>
-                  </a:gs>
                 </a:gsLst>
-                <a:lin ang="15000000" scaled="0"/>
+                <a:lin ang="15000000"/>
               </a:gradFill>
-              <a:ln>
+              <a:ln w="0">
                 <a:noFill/>
+                <a:prstDash/>
               </a:ln>
             </p:spPr>
             <p:style>
@@ -21991,77 +21988,79 @@
               </a:fontRef>
             </p:style>
             <p:txBody>
-              <a:bodyPr wrap="square" rtlCol="0" anchor="ctr">
+              <a:bodyPr wrap="square" lIns="91440" tIns="45720" rIns="91440" bIns="45720" numCol="1" vert="horz" anchor="ctr">
                 <a:noAutofit/>
               </a:bodyPr>
               <a:lstStyle/>
               <a:p>
-                <a:pPr algn="ctr"/>
+                <a:pPr marL="0" indent="0" algn="ctr" latinLnBrk="0">
+                  <a:buFontTx/>
+                  <a:buNone/>
+                </a:pPr>
                 <a:endParaRPr lang="ko-KR" altLang="en-US" sz="1400"/>
               </a:p>
             </p:txBody>
           </p:sp>
           <p:sp>
             <p:nvSpPr>
-              <p:cNvPr id="121" name="TextBox 120">
-                <a:extLst>
-                  <a:ext uri="{FF2B5EF4-FFF2-40B4-BE49-F238E27FC236}">
-                    <a16:creationId xmlns:a16="http://schemas.microsoft.com/office/drawing/2014/main" id="{B19A7F1C-BDCB-C77C-081D-155B7A2BD92B}"/>
-                  </a:ext>
-                </a:extLst>
-              </p:cNvPr>
-              <p:cNvSpPr txBox="1"/>
+              <p:cNvPr id="121" name="TextBox 120"/>
+              <p:cNvSpPr txBox="1">
+                <a:spLocks/>
+              </p:cNvSpPr>
               <p:nvPr/>
             </p:nvSpPr>
             <p:spPr>
-              <a:xfrm>
-                <a:off x="616568" y="2271884"/>
-                <a:ext cx="557043" cy="536445"/>
+              <a:xfrm rot="0">
+                <a:off x="10554970" y="2439035"/>
+                <a:ext cx="256540" cy="247015"/>
               </a:xfrm>
-              <a:prstGeom prst="rect">
-                <a:avLst/>
-              </a:prstGeom>
+              <a:prstGeom prst="rect"/>
               <a:noFill/>
             </p:spPr>
             <p:txBody>
-              <a:bodyPr wrap="square" lIns="0" tIns="0" rIns="0" bIns="0" rtlCol="0">
+              <a:bodyPr wrap="square" lIns="0" tIns="0" rIns="0" bIns="0" numCol="1" vert="horz" anchor="t">
                 <a:spAutoFit/>
               </a:bodyPr>
               <a:lstStyle/>
               <a:p>
-                <a:pPr algn="ctr" latinLnBrk="0"/>
+                <a:pPr marL="0" indent="0" algn="ctr" latinLnBrk="0">
+                  <a:buFontTx/>
+                  <a:buNone/>
+                </a:pPr>
                 <a:r>
-                  <a:rPr lang="en-US" altLang="ko-KR" sz="1600" dirty="0">
-                    <a:ln>
+                  <a:rPr lang="en-US" altLang="ko-KR" sz="1600">
+                    <a:ln w="9525" cap="flat" cmpd="sng">
                       <a:solidFill>
                         <a:schemeClr val="accent1">
                           <a:alpha val="0"/>
                         </a:schemeClr>
                       </a:solidFill>
+                      <a:prstDash val="solid"/>
                     </a:ln>
                     <a:solidFill>
                       <a:schemeClr val="bg1"/>
                     </a:solidFill>
-                    <a:latin typeface="세방고딕 Bold" panose="00000800000000000000" pitchFamily="2" charset="-127"/>
-                    <a:ea typeface="세방고딕 Bold" panose="00000800000000000000" pitchFamily="2" charset="-127"/>
-                    <a:cs typeface="Pretendard SemiBold" panose="02000703000000020004" pitchFamily="2" charset="-127"/>
+                    <a:latin typeface="세방고딕 Bold" charset="0"/>
+                    <a:ea typeface="세방고딕 Bold" charset="0"/>
+                    <a:cs typeface="Pretendard SemiBold" charset="0"/>
                   </a:rPr>
                   <a:t>5</a:t>
                 </a:r>
-                <a:endParaRPr lang="ko-KR" altLang="en-US" sz="1200" dirty="0">
-                  <a:ln>
+                <a:endParaRPr lang="ko-KR" altLang="en-US" sz="1600">
+                  <a:ln w="9525" cap="flat" cmpd="sng">
                     <a:solidFill>
                       <a:schemeClr val="accent1">
                         <a:alpha val="0"/>
                       </a:schemeClr>
                     </a:solidFill>
+                    <a:prstDash val="solid"/>
                   </a:ln>
                   <a:solidFill>
                     <a:schemeClr val="bg1"/>
                   </a:solidFill>
-                  <a:latin typeface="세방고딕 Bold" panose="00000800000000000000" pitchFamily="2" charset="-127"/>
-                  <a:ea typeface="세방고딕 Bold" panose="00000800000000000000" pitchFamily="2" charset="-127"/>
-                  <a:cs typeface="Pretendard SemiBold" panose="02000703000000020004" pitchFamily="2" charset="-127"/>
+                  <a:latin typeface="세방고딕 Bold" charset="0"/>
+                  <a:ea typeface="세방고딕 Bold" charset="0"/>
+                  <a:cs typeface="Pretendard SemiBold" charset="0"/>
                 </a:endParaRPr>
               </a:p>
             </p:txBody>
@@ -22069,137 +22068,168 @@
         </p:grpSp>
         <p:sp>
           <p:nvSpPr>
-            <p:cNvPr id="116" name="TextBox 115">
-              <a:extLst>
-                <a:ext uri="{FF2B5EF4-FFF2-40B4-BE49-F238E27FC236}">
-                  <a16:creationId xmlns:a16="http://schemas.microsoft.com/office/drawing/2014/main" id="{56350446-6771-1509-1C33-D986D90321A6}"/>
-                </a:ext>
-              </a:extLst>
-            </p:cNvPr>
-            <p:cNvSpPr txBox="1"/>
+            <p:cNvPr id="116" name="TextBox 115"/>
+            <p:cNvSpPr txBox="1">
+              <a:spLocks/>
+            </p:cNvSpPr>
             <p:nvPr/>
           </p:nvSpPr>
           <p:spPr>
-            <a:xfrm>
-              <a:off x="9833059" y="3060042"/>
-              <a:ext cx="1704241" cy="735586"/>
+            <a:xfrm rot="0">
+              <a:off x="9823450" y="3060065"/>
+              <a:ext cx="1704975" cy="735965"/>
             </a:xfrm>
-            <a:prstGeom prst="rect">
-              <a:avLst/>
-            </a:prstGeom>
+            <a:prstGeom prst="rect"/>
             <a:noFill/>
           </p:spPr>
           <p:txBody>
-            <a:bodyPr wrap="square">
+            <a:bodyPr wrap="square" lIns="91440" tIns="45720" rIns="91440" bIns="45720" numCol="1" vert="horz" anchor="t">
               <a:spAutoFit/>
             </a:bodyPr>
             <a:lstStyle/>
             <a:p>
-              <a:pPr algn="ctr">
+              <a:pPr marL="0" indent="0" algn="ctr" latinLnBrk="0">
                 <a:lnSpc>
                   <a:spcPct val="110000"/>
                 </a:lnSpc>
+                <a:buFontTx/>
+                <a:buNone/>
                 <a:defRPr/>
               </a:pPr>
               <a:r>
-                <a:rPr lang="ko-KR" altLang="en-US" sz="1900" b="1" dirty="0">
-                  <a:ln>
+                <a:rPr lang="ko-KR" altLang="en-US" sz="1900" b="1">
+                  <a:ln w="9525" cap="flat" cmpd="sng">
                     <a:solidFill>
                       <a:schemeClr val="accent1">
                         <a:shade val="15000"/>
                         <a:alpha val="0"/>
                       </a:schemeClr>
                     </a:solidFill>
+                    <a:prstDash val="solid"/>
                   </a:ln>
                   <a:solidFill>
                     <a:srgbClr val="3378C8"/>
                   </a:solidFill>
-                  <a:latin typeface="세방고딕 Bold" panose="00000800000000000000" pitchFamily="2" charset="-127"/>
-                  <a:ea typeface="세방고딕 Bold" panose="00000800000000000000" pitchFamily="2" charset="-127"/>
+                  <a:latin typeface="세방고딕 Bold" charset="0"/>
+                  <a:ea typeface="세방고딕 Bold" charset="0"/>
                 </a:rPr>
                 <a:t>활용방안 및</a:t>
               </a:r>
-              <a:br>
-                <a:rPr lang="en-US" altLang="ko-KR" sz="1900" b="1" dirty="0">
-                  <a:ln>
+              <a:r>
+                <a:rPr lang="en-US" altLang="ko-KR" sz="1900" b="1">
+                  <a:ln w="9525" cap="flat" cmpd="sng">
                     <a:solidFill>
                       <a:schemeClr val="accent1">
                         <a:shade val="15000"/>
                         <a:alpha val="0"/>
                       </a:schemeClr>
                     </a:solidFill>
+                    <a:prstDash val="solid"/>
                   </a:ln>
                   <a:solidFill>
                     <a:srgbClr val="3378C8"/>
                   </a:solidFill>
-                  <a:latin typeface="세방고딕 Bold" panose="00000800000000000000" pitchFamily="2" charset="-127"/>
-                  <a:ea typeface="세방고딕 Bold" panose="00000800000000000000" pitchFamily="2" charset="-127"/>
+                  <a:latin typeface="세방고딕 Bold" charset="0"/>
+                  <a:ea typeface="세방고딕 Bold" charset="0"/>
                 </a:rPr>
-              </a:br>
-              <a:r>
-                <a:rPr lang="ko-KR" altLang="en-US" sz="1900" b="1" dirty="0">
-                  <a:ln>
+                <a:t/>
+              </a:r>
+              <a:br>
+                <a:rPr lang="en-US" altLang="ko-KR" sz="1900" b="1">
+                  <a:ln w="9525" cap="flat" cmpd="sng">
                     <a:solidFill>
                       <a:schemeClr val="accent1">
                         <a:shade val="15000"/>
                         <a:alpha val="0"/>
                       </a:schemeClr>
                     </a:solidFill>
+                    <a:prstDash val="solid"/>
                   </a:ln>
                   <a:solidFill>
                     <a:srgbClr val="3378C8"/>
                   </a:solidFill>
-                  <a:latin typeface="세방고딕 Bold" panose="00000800000000000000" pitchFamily="2" charset="-127"/>
-                  <a:ea typeface="세방고딕 Bold" panose="00000800000000000000" pitchFamily="2" charset="-127"/>
+                  <a:latin typeface="세방고딕 Bold" charset="0"/>
+                  <a:ea typeface="세방고딕 Bold" charset="0"/>
                 </a:rPr>
-                <a:t>기대 효과</a:t>
-              </a:r>
-            </a:p>
-          </p:txBody>
-        </p:sp>
-        <p:sp>
-          <p:nvSpPr>
-            <p:cNvPr id="117" name="TextBox 116">
-              <a:extLst>
-                <a:ext uri="{FF2B5EF4-FFF2-40B4-BE49-F238E27FC236}">
-                  <a16:creationId xmlns:a16="http://schemas.microsoft.com/office/drawing/2014/main" id="{D87F30DB-0C46-D738-9EDC-BA98CB38FF11}"/>
-                </a:ext>
-              </a:extLst>
-            </p:cNvPr>
-            <p:cNvSpPr txBox="1"/>
-            <p:nvPr/>
-          </p:nvSpPr>
-          <p:spPr>
-            <a:xfrm>
-              <a:off x="9626748" y="4453027"/>
-              <a:ext cx="2122307" cy="887615"/>
-            </a:xfrm>
-            <a:prstGeom prst="rect">
-              <a:avLst/>
-            </a:prstGeom>
-            <a:noFill/>
-          </p:spPr>
-          <p:txBody>
-            <a:bodyPr wrap="square">
-              <a:spAutoFit/>
-            </a:bodyPr>
-            <a:lstStyle/>
-            <a:p>
-              <a:pPr algn="ctr">
-                <a:lnSpc>
-                  <a:spcPct val="110000"/>
-                </a:lnSpc>
-                <a:defRPr/>
-              </a:pPr>
+              </a:br>
               <a:r>
-                <a:rPr lang="ko-KR" altLang="en-US" sz="1200" dirty="0">
-                  <a:ln>
+                <a:rPr lang="ko-KR" altLang="en-US" sz="1900" b="1">
+                  <a:ln w="9525" cap="flat" cmpd="sng">
                     <a:solidFill>
                       <a:schemeClr val="accent1">
                         <a:shade val="15000"/>
                         <a:alpha val="0"/>
                       </a:schemeClr>
                     </a:solidFill>
+                    <a:prstDash val="solid"/>
+                  </a:ln>
+                  <a:solidFill>
+                    <a:srgbClr val="3378C8"/>
+                  </a:solidFill>
+                  <a:latin typeface="세방고딕 Bold" charset="0"/>
+                  <a:ea typeface="세방고딕 Bold" charset="0"/>
+                </a:rPr>
+                <a:t>기대 효과</a:t>
+              </a:r>
+              <a:endParaRPr lang="ko-KR" altLang="en-US" sz="1900" b="1">
+                <a:ln w="9525" cap="flat" cmpd="sng">
+                  <a:solidFill>
+                    <a:schemeClr val="accent1">
+                      <a:shade val="15000"/>
+                      <a:alpha val="0"/>
+                    </a:schemeClr>
+                  </a:solidFill>
+                  <a:prstDash val="solid"/>
+                </a:ln>
+                <a:solidFill>
+                  <a:srgbClr val="3378C8"/>
+                </a:solidFill>
+                <a:latin typeface="세방고딕 Bold" charset="0"/>
+                <a:ea typeface="세방고딕 Bold" charset="0"/>
+              </a:endParaRPr>
+            </a:p>
+          </p:txBody>
+        </p:sp>
+        <p:sp>
+          <p:nvSpPr>
+            <p:cNvPr id="117" name="TextBox 116"/>
+            <p:cNvSpPr txBox="1">
+              <a:spLocks/>
+            </p:cNvSpPr>
+            <p:nvPr/>
+          </p:nvSpPr>
+          <p:spPr>
+            <a:xfrm rot="0">
+              <a:off x="9617075" y="4453255"/>
+              <a:ext cx="2122805" cy="888365"/>
+            </a:xfrm>
+            <a:prstGeom prst="rect"/>
+            <a:noFill/>
+          </p:spPr>
+          <p:txBody>
+            <a:bodyPr wrap="square" lIns="91440" tIns="45720" rIns="91440" bIns="45720" numCol="1" vert="horz" anchor="t">
+              <a:spAutoFit/>
+            </a:bodyPr>
+            <a:lstStyle/>
+            <a:p>
+              <a:pPr marL="0" indent="0" algn="ctr" latinLnBrk="0">
+                <a:lnSpc>
+                  <a:spcPct val="110000"/>
+                </a:lnSpc>
+                <a:buFontTx/>
+                <a:buNone/>
+                <a:defRPr/>
+              </a:pPr>
+              <a:r>
+                <a:rPr lang="ko-KR" altLang="en-US" sz="1200">
+                  <a:ln w="9525" cap="flat" cmpd="sng">
+                    <a:solidFill>
+                      <a:schemeClr val="accent1">
+                        <a:shade val="15000"/>
+                        <a:alpha val="0"/>
+                      </a:schemeClr>
+                    </a:solidFill>
+                    <a:prstDash val="solid"/>
                   </a:ln>
                   <a:solidFill>
                     <a:schemeClr val="tx1">
@@ -22207,20 +22237,21 @@
                       <a:lumOff val="25000"/>
                     </a:schemeClr>
                   </a:solidFill>
-                  <a:latin typeface="세방고딕 Regular" panose="00000500000000000000" pitchFamily="2" charset="-127"/>
-                  <a:ea typeface="세방고딕 Regular" panose="00000500000000000000" pitchFamily="2" charset="-127"/>
+                  <a:latin typeface="세방고딕 Regular" charset="0"/>
+                  <a:ea typeface="세방고딕 Regular" charset="0"/>
                 </a:rPr>
                 <a:t>사용자의 위치</a:t>
               </a:r>
               <a:r>
-                <a:rPr lang="en-US" altLang="ko-KR" sz="1200" dirty="0">
-                  <a:ln>
+                <a:rPr lang="en-US" altLang="ko-KR" sz="1200">
+                  <a:ln w="9525" cap="flat" cmpd="sng">
                     <a:solidFill>
                       <a:schemeClr val="accent1">
                         <a:shade val="15000"/>
                         <a:alpha val="0"/>
                       </a:schemeClr>
                     </a:solidFill>
+                    <a:prstDash val="solid"/>
                   </a:ln>
                   <a:solidFill>
                     <a:schemeClr val="tx1">
@@ -22228,20 +22259,21 @@
                       <a:lumOff val="25000"/>
                     </a:schemeClr>
                   </a:solidFill>
-                  <a:latin typeface="세방고딕 Regular" panose="00000500000000000000" pitchFamily="2" charset="-127"/>
-                  <a:ea typeface="세방고딕 Regular" panose="00000500000000000000" pitchFamily="2" charset="-127"/>
+                  <a:latin typeface="세방고딕 Regular" charset="0"/>
+                  <a:ea typeface="세방고딕 Regular" charset="0"/>
                 </a:rPr>
                 <a:t>,</a:t>
               </a:r>
               <a:r>
-                <a:rPr lang="ko-KR" altLang="en-US" sz="1200" dirty="0">
-                  <a:ln>
+                <a:rPr lang="ko-KR" altLang="en-US" sz="1200">
+                  <a:ln w="9525" cap="flat" cmpd="sng">
                     <a:solidFill>
                       <a:schemeClr val="accent1">
                         <a:shade val="15000"/>
                         <a:alpha val="0"/>
                       </a:schemeClr>
                     </a:solidFill>
+                    <a:prstDash val="solid"/>
                   </a:ln>
                   <a:solidFill>
                     <a:schemeClr val="tx1">
@@ -22249,20 +22281,21 @@
                       <a:lumOff val="25000"/>
                     </a:schemeClr>
                   </a:solidFill>
-                  <a:latin typeface="세방고딕 Regular" panose="00000500000000000000" pitchFamily="2" charset="-127"/>
-                  <a:ea typeface="세방고딕 Regular" panose="00000500000000000000" pitchFamily="2" charset="-127"/>
+                  <a:latin typeface="세방고딕 Regular" charset="0"/>
+                  <a:ea typeface="세방고딕 Regular" charset="0"/>
                 </a:rPr>
                 <a:t>검색</a:t>
               </a:r>
               <a:r>
-                <a:rPr lang="en-US" altLang="ko-KR" sz="1200" dirty="0">
-                  <a:ln>
+                <a:rPr lang="en-US" altLang="ko-KR" sz="1200">
+                  <a:ln w="9525" cap="flat" cmpd="sng">
                     <a:solidFill>
                       <a:schemeClr val="accent1">
                         <a:shade val="15000"/>
                         <a:alpha val="0"/>
                       </a:schemeClr>
                     </a:solidFill>
+                    <a:prstDash val="solid"/>
                   </a:ln>
                   <a:solidFill>
                     <a:schemeClr val="tx1">
@@ -22270,20 +22303,21 @@
                       <a:lumOff val="25000"/>
                     </a:schemeClr>
                   </a:solidFill>
-                  <a:latin typeface="세방고딕 Regular" panose="00000500000000000000" pitchFamily="2" charset="-127"/>
-                  <a:ea typeface="세방고딕 Regular" panose="00000500000000000000" pitchFamily="2" charset="-127"/>
+                  <a:latin typeface="세방고딕 Regular" charset="0"/>
+                  <a:ea typeface="세방고딕 Regular" charset="0"/>
                 </a:rPr>
                 <a:t>,</a:t>
               </a:r>
               <a:r>
-                <a:rPr lang="ko-KR" altLang="en-US" sz="1200" dirty="0">
-                  <a:ln>
+                <a:rPr lang="ko-KR" altLang="en-US" sz="1200">
+                  <a:ln w="9525" cap="flat" cmpd="sng">
                     <a:solidFill>
                       <a:schemeClr val="accent1">
                         <a:shade val="15000"/>
                         <a:alpha val="0"/>
                       </a:schemeClr>
                     </a:solidFill>
+                    <a:prstDash val="solid"/>
                   </a:ln>
                   <a:solidFill>
                     <a:schemeClr val="tx1">
@@ -22291,20 +22325,21 @@
                       <a:lumOff val="25000"/>
                     </a:schemeClr>
                   </a:solidFill>
-                  <a:latin typeface="세방고딕 Regular" panose="00000500000000000000" pitchFamily="2" charset="-127"/>
-                  <a:ea typeface="세방고딕 Regular" panose="00000500000000000000" pitchFamily="2" charset="-127"/>
+                  <a:latin typeface="세방고딕 Regular" charset="0"/>
+                  <a:ea typeface="세방고딕 Regular" charset="0"/>
                 </a:rPr>
                 <a:t>선택 등의 데이터를 수집</a:t>
               </a:r>
               <a:r>
-                <a:rPr lang="en-US" altLang="ko-KR" sz="1200" dirty="0">
-                  <a:ln>
+                <a:rPr lang="en-US" altLang="ko-KR" sz="1200">
+                  <a:ln w="9525" cap="flat" cmpd="sng">
                     <a:solidFill>
                       <a:schemeClr val="accent1">
                         <a:shade val="15000"/>
                         <a:alpha val="0"/>
                       </a:schemeClr>
                     </a:solidFill>
+                    <a:prstDash val="solid"/>
                   </a:ln>
                   <a:solidFill>
                     <a:schemeClr val="tx1">
@@ -22312,20 +22347,21 @@
                       <a:lumOff val="25000"/>
                     </a:schemeClr>
                   </a:solidFill>
-                  <a:latin typeface="세방고딕 Regular" panose="00000500000000000000" pitchFamily="2" charset="-127"/>
-                  <a:ea typeface="세방고딕 Regular" panose="00000500000000000000" pitchFamily="2" charset="-127"/>
+                  <a:latin typeface="세방고딕 Regular" charset="0"/>
+                  <a:ea typeface="세방고딕 Regular" charset="0"/>
                 </a:rPr>
                 <a:t>,</a:t>
               </a:r>
               <a:r>
-                <a:rPr lang="ko-KR" altLang="en-US" sz="1200" dirty="0">
-                  <a:ln>
+                <a:rPr lang="ko-KR" altLang="en-US" sz="1200">
+                  <a:ln w="9525" cap="flat" cmpd="sng">
                     <a:solidFill>
                       <a:schemeClr val="accent1">
                         <a:shade val="15000"/>
                         <a:alpha val="0"/>
                       </a:schemeClr>
                     </a:solidFill>
+                    <a:prstDash val="solid"/>
                   </a:ln>
                   <a:solidFill>
                     <a:schemeClr val="tx1">
@@ -22333,20 +22369,21 @@
                       <a:lumOff val="25000"/>
                     </a:schemeClr>
                   </a:solidFill>
-                  <a:latin typeface="세방고딕 Regular" panose="00000500000000000000" pitchFamily="2" charset="-127"/>
-                  <a:ea typeface="세방고딕 Regular" panose="00000500000000000000" pitchFamily="2" charset="-127"/>
+                  <a:latin typeface="세방고딕 Regular" charset="0"/>
+                  <a:ea typeface="세방고딕 Regular" charset="0"/>
                 </a:rPr>
                 <a:t>분석하여 연계 서비스</a:t>
               </a:r>
               <a:r>
-                <a:rPr lang="en-US" altLang="ko-KR" sz="1200" dirty="0">
-                  <a:ln>
+                <a:rPr lang="en-US" altLang="ko-KR" sz="1200">
+                  <a:ln w="9525" cap="flat" cmpd="sng">
                     <a:solidFill>
                       <a:schemeClr val="accent1">
                         <a:shade val="15000"/>
                         <a:alpha val="0"/>
                       </a:schemeClr>
                     </a:solidFill>
+                    <a:prstDash val="solid"/>
                   </a:ln>
                   <a:solidFill>
                     <a:schemeClr val="tx1">
@@ -22354,20 +22391,21 @@
                       <a:lumOff val="25000"/>
                     </a:schemeClr>
                   </a:solidFill>
-                  <a:latin typeface="세방고딕 Regular" panose="00000500000000000000" pitchFamily="2" charset="-127"/>
-                  <a:ea typeface="세방고딕 Regular" panose="00000500000000000000" pitchFamily="2" charset="-127"/>
+                  <a:latin typeface="세방고딕 Regular" charset="0"/>
+                  <a:ea typeface="세방고딕 Regular" charset="0"/>
                 </a:rPr>
                 <a:t>, </a:t>
               </a:r>
               <a:r>
-                <a:rPr lang="ko-KR" altLang="en-US" sz="1200" dirty="0">
-                  <a:ln>
+                <a:rPr lang="ko-KR" altLang="en-US" sz="1200">
+                  <a:ln w="9525" cap="flat" cmpd="sng">
                     <a:solidFill>
                       <a:schemeClr val="accent1">
                         <a:shade val="15000"/>
                         <a:alpha val="0"/>
                       </a:schemeClr>
                     </a:solidFill>
+                    <a:prstDash val="solid"/>
                   </a:ln>
                   <a:solidFill>
                     <a:schemeClr val="tx1">
@@ -22375,19 +22413,20 @@
                       <a:lumOff val="25000"/>
                     </a:schemeClr>
                   </a:solidFill>
-                  <a:latin typeface="세방고딕 Regular" panose="00000500000000000000" pitchFamily="2" charset="-127"/>
-                  <a:ea typeface="세방고딕 Regular" panose="00000500000000000000" pitchFamily="2" charset="-127"/>
+                  <a:latin typeface="세방고딕 Regular" charset="0"/>
+                  <a:ea typeface="세방고딕 Regular" charset="0"/>
                 </a:rPr>
                 <a:t>광고 추천 패턴 등 활용가능</a:t>
               </a:r>
-              <a:endParaRPr lang="en-US" altLang="ko-KR" sz="1200" dirty="0">
-                <a:ln>
+              <a:endParaRPr lang="ko-KR" altLang="en-US" sz="1200">
+                <a:ln w="9525" cap="flat" cmpd="sng">
                   <a:solidFill>
                     <a:schemeClr val="accent1">
                       <a:shade val="15000"/>
                       <a:alpha val="0"/>
                     </a:schemeClr>
                   </a:solidFill>
+                  <a:prstDash val="solid"/>
                 </a:ln>
                 <a:solidFill>
                   <a:schemeClr val="tx1">
@@ -22395,38 +22434,33 @@
                     <a:lumOff val="25000"/>
                   </a:schemeClr>
                 </a:solidFill>
-                <a:latin typeface="세방고딕 Regular" panose="00000500000000000000" pitchFamily="2" charset="-127"/>
-                <a:ea typeface="세방고딕 Regular" panose="00000500000000000000" pitchFamily="2" charset="-127"/>
+                <a:latin typeface="세방고딕 Regular" charset="0"/>
+                <a:ea typeface="세방고딕 Regular" charset="0"/>
               </a:endParaRPr>
             </a:p>
           </p:txBody>
         </p:sp>
         <p:cxnSp>
           <p:nvCxnSpPr>
-            <p:cNvPr id="118" name="직선 연결선 117">
-              <a:extLst>
-                <a:ext uri="{FF2B5EF4-FFF2-40B4-BE49-F238E27FC236}">
-                  <a16:creationId xmlns:a16="http://schemas.microsoft.com/office/drawing/2014/main" id="{FC2AFA84-BAD4-C827-E0E3-CE251C052D01}"/>
-                </a:ext>
-              </a:extLst>
-            </p:cNvPr>
+            <p:cNvPr id="118" name="직선 연결선 117"/>
             <p:cNvCxnSpPr>
               <a:cxnSpLocks/>
             </p:cNvCxnSpPr>
             <p:nvPr/>
           </p:nvCxnSpPr>
           <p:spPr>
-            <a:xfrm>
-              <a:off x="10583679" y="4260129"/>
-              <a:ext cx="208445" cy="0"/>
+            <a:xfrm rot="0">
+              <a:off x="10574020" y="4260215"/>
+              <a:ext cx="208915" cy="635"/>
             </a:xfrm>
-            <a:prstGeom prst="line">
-              <a:avLst/>
-            </a:prstGeom>
-            <a:ln w="19050">
+            <a:prstGeom prst="line"/>
+            <a:ln w="19050" cap="flat" cmpd="sng">
               <a:solidFill>
-                <a:srgbClr val="3378C8"/>
+                <a:srgbClr val="3378C8">
+                  <a:alpha val="100000"/>
+                </a:srgbClr>
               </a:solidFill>
+              <a:prstDash val="solid"/>
             </a:ln>
           </p:spPr>
           <p:style>
@@ -22459,15 +22493,15 @@
         </p:nvGrpSpPr>
         <p:grpSpPr>
           <a:xfrm>
-            <a:off x="10667149" y="6576811"/>
-            <a:ext cx="1075644" cy="150807"/>
-            <a:chOff x="921102" y="6027409"/>
-            <a:chExt cx="2680001" cy="375740"/>
+            <a:off x="10667365" y="6576695"/>
+            <a:ext cx="1075690" cy="150495"/>
+            <a:chOff x="10667365" y="6576695"/>
+            <a:chExt cx="1075690" cy="150495"/>
           </a:xfrm>
         </p:grpSpPr>
         <p:pic>
           <p:nvPicPr>
-            <p:cNvPr id="128" name="_x278651016" descr="EMB0000378c3f3d">
+            <p:cNvPr id="128" name="_x278651016">
               <a:extLst>
                 <a:ext uri="{FF2B5EF4-FFF2-40B4-BE49-F238E27FC236}">
                   <a16:creationId xmlns:a16="http://schemas.microsoft.com/office/drawing/2014/main" id="{63145737-FAD3-C459-34E2-FEA7EE5FEDB2}"/>
@@ -22494,8 +22528,8 @@
           </p:blipFill>
           <p:spPr bwMode="auto">
             <a:xfrm>
-              <a:off x="2420865" y="6027409"/>
-              <a:ext cx="1180238" cy="375740"/>
+              <a:off x="11269345" y="6576695"/>
+              <a:ext cx="473710" cy="150495"/>
             </a:xfrm>
             <a:prstGeom prst="rect">
               <a:avLst/>
@@ -22543,8 +22577,8 @@
           </p:blipFill>
           <p:spPr>
             <a:xfrm>
-              <a:off x="921102" y="6027409"/>
-              <a:ext cx="1190542" cy="353945"/>
+              <a:off x="10667365" y="6576695"/>
+              <a:ext cx="477520" cy="142240"/>
             </a:xfrm>
             <a:prstGeom prst="rect">
               <a:avLst/>
@@ -22566,8 +22600,8 @@
         </p:nvSpPr>
         <p:spPr>
           <a:xfrm>
-            <a:off x="495389" y="4447328"/>
-            <a:ext cx="2122307" cy="887615"/>
+            <a:off x="495300" y="4447540"/>
+            <a:ext cx="2122170" cy="887730"/>
           </a:xfrm>
           <a:prstGeom prst="rect">
             <a:avLst/>
@@ -22642,8 +22676,8 @@
         </p:nvSpPr>
         <p:spPr>
           <a:xfrm>
-            <a:off x="7339078" y="4453027"/>
-            <a:ext cx="2122307" cy="1497013"/>
+            <a:off x="7339330" y="4453255"/>
+            <a:ext cx="2122170" cy="1497330"/>
           </a:xfrm>
           <a:prstGeom prst="rect">
             <a:avLst/>
@@ -23215,6 +23249,21 @@
   <p:clrMapOvr>
     <a:masterClrMapping/>
   </p:clrMapOvr>
+  <mc:AlternateContent xmlns:mc="http://schemas.openxmlformats.org/markup-compatibility/2006">
+    <mc:Choice xmlns:p14="http://schemas.microsoft.com/office/powerpoint/2010/main" Requires="p14">
+      <p:transition spd="slow" p14:dur="2000"/>
+    </mc:Choice>
+    <mc:Fallback>
+      <p:transition spd="slow"/>
+    </mc:Fallback>
+  </mc:AlternateContent>
+  <p:timing>
+    <p:tnLst>
+      <p:par>
+        <p:cTn id="1" dur="indefinite" restart="never" nodeType="tmRoot"/>
+      </p:par>
+    </p:tnLst>
+  </p:timing>
 </p:sld>
 </file>
 
